--- a/DangQuocThanhTai_Bao_cao_cuoi_ky.pptx
+++ b/DangQuocThanhTai_Bao_cao_cuoi_ky.pptx
@@ -3298,51 +3298,23 @@
           </a:bodyPr>
           <a:lstStyle/>
           <a:p>
-            <a:pPr>
-              <a:defRPr sz="1300" b="1">
-                <a:solidFill>
-                  <a:srgbClr val="102C57"/>
-                </a:solidFill>
-              </a:defRPr>
-            </a:pPr>
             <a:r>
               <a:t>Sinh viên thực hiện:  ĐẶNG QUỐC THÀNH TÀI  -  MSSV: 23110149  (Lớp: 261AIOT331185_01CLC)</a:t>
             </a:r>
           </a:p>
           <a:p>
-            <a:pPr>
-              <a:defRPr sz="1300" b="1">
-                <a:solidFill>
-                  <a:srgbClr val="1E1E1E"/>
-                </a:solidFill>
-              </a:defRPr>
-            </a:pPr>
             <a:r>
               <a:t>Giảng viên hướng dẫn:  ThS/TS. HỒ NHỰT MINH</a:t>
             </a:r>
           </a:p>
           <a:p>
-            <a:pPr>
-              <a:defRPr sz="1200">
-                <a:solidFill>
-                  <a:srgbClr val="505050"/>
-                </a:solidFill>
-              </a:defRPr>
-            </a:pPr>
             <a:r>
               <a:t>Bộ dữ liệu thực nghiệm:  Free Spoken Digit Dataset (FSDD - 3.000 file WAV mono 8 kHz)</a:t>
             </a:r>
           </a:p>
           <a:p>
-            <a:pPr>
-              <a:defRPr sz="1200">
-                <a:solidFill>
-                  <a:srgbClr val="3572EF"/>
-                </a:solidFill>
-              </a:defRPr>
-            </a:pPr>
-            <a:r>
-              <a:t>Mã nguồn GitHub:  https://github.com/DangQuocThanhTai/cvae-spoken-digit-tstr</a:t>
+            <a:r>
+              <a:t>Mã nguồn GitHub:  https://github.com/dqtt2005/DANGQUOCTHANHTAI_final</a:t>
             </a:r>
           </a:p>
         </p:txBody>

--- a/DangQuocThanhTai_Bao_cao_cuoi_ky.pptx
+++ b/DangQuocThanhTai_Bao_cao_cuoi_ky.pptx
@@ -7305,10 +7305,6 @@
               </a:defRPr>
             </a:pPr>
             <a:r>
-              <a:rPr dirty="0"/>
-              <a:t>• </a:t>
-            </a:r>
-            <a:r>
               <a:rPr dirty="0" err="1"/>
               <a:t>Nhận</a:t>
             </a:r>
@@ -7452,6 +7448,7 @@
               <a:rPr dirty="0"/>
               <a:t>.</a:t>
             </a:r>
+            <a:endParaRPr lang="en-US" dirty="0"/>
           </a:p>
           <a:p>
             <a:pPr>
@@ -7465,10 +7462,6 @@
               </a:defRPr>
             </a:pPr>
             <a:r>
-              <a:rPr dirty="0"/>
-              <a:t>• </a:t>
-            </a:r>
-            <a:r>
               <a:rPr dirty="0" err="1"/>
               <a:t>Dữ</a:t>
             </a:r>
@@ -7681,10 +7674,6 @@
               </a:defRPr>
             </a:pPr>
             <a:r>
-              <a:rPr dirty="0"/>
-              <a:t>• </a:t>
-            </a:r>
-            <a:r>
               <a:rPr dirty="0" err="1"/>
               <a:t>Mô</a:t>
             </a:r>
@@ -7850,7 +7839,7 @@
             </a:pPr>
             <a:r>
               <a:rPr dirty="0"/>
-              <a:t>• Phạm vi </a:t>
+              <a:t>Phạm vi </a:t>
             </a:r>
             <a:r>
               <a:rPr dirty="0" err="1"/>
@@ -8051,8 +8040,8 @@
         </p:nvSpPr>
         <p:spPr>
           <a:xfrm>
-            <a:off x="6217920" y="2600531"/>
-            <a:ext cx="5517689" cy="1992853"/>
+            <a:off x="6217921" y="2600531"/>
+            <a:ext cx="5147386" cy="1992853"/>
           </a:xfrm>
           <a:prstGeom prst="rect">
             <a:avLst/>
@@ -8130,10 +8119,6 @@
               </a:defRPr>
             </a:pPr>
             <a:r>
-              <a:rPr dirty="0"/>
-              <a:t>• </a:t>
-            </a:r>
-            <a:r>
               <a:rPr dirty="0" err="1"/>
               <a:t>Dữ</a:t>
             </a:r>
@@ -8210,10 +8195,6 @@
               </a:defRPr>
             </a:pPr>
             <a:r>
-              <a:rPr dirty="0"/>
-              <a:t>• </a:t>
-            </a:r>
-            <a:r>
               <a:rPr dirty="0" err="1"/>
               <a:t>Mô</a:t>
             </a:r>
@@ -8339,7 +8320,7 @@
             </a:pPr>
             <a:r>
               <a:rPr dirty="0"/>
-              <a:t>• Sinh </a:t>
+              <a:t>Sinh </a:t>
             </a:r>
             <a:r>
               <a:rPr dirty="0" err="1"/>
@@ -8473,10 +8454,6 @@
                 </a:solidFill>
               </a:defRPr>
             </a:pPr>
-            <a:r>
-              <a:rPr dirty="0"/>
-              <a:t>• </a:t>
-            </a:r>
             <a:r>
               <a:rPr dirty="0" err="1"/>
               <a:t>Câu</a:t>
